--- a/content/sessions/slides/Session-2-Speaking-It-So-Youre-Heard.pptx
+++ b/content/sessions/slides/Session-2-Speaking-It-So-Youre-Heard.pptx
@@ -121,6 +121,1546 @@
     </a:lvl9pPr>
   </p:defaultTextStyle>
 </p:presentation>
+</file>
+
+<file path=ppt/notesMasters/notesMaster1.xml><?xml version="1.0" encoding="utf-8"?>
+<p:notesMaster xmlns:a="http://schemas.openxmlformats.org/drawingml/2006/main" xmlns:p="http://schemas.openxmlformats.org/presentationml/2006/main" xmlns:r="http://schemas.openxmlformats.org/officeDocument/2006/relationships">
+  <p:cSld>
+    <p:bg>
+      <p:bgRef idx="1001">
+        <a:schemeClr val="bg1"/>
+      </p:bgRef>
+    </p:bg>
+    <p:spTree>
+      <p:nvGrpSpPr>
+        <p:cNvPr id="1" name=""/>
+        <p:cNvGrpSpPr/>
+        <p:nvPr/>
+      </p:nvGrpSpPr>
+      <p:grpSpPr>
+        <a:xfrm>
+          <a:off x="0" y="0"/>
+          <a:ext cx="0" cy="0"/>
+          <a:chOff x="0" y="0"/>
+          <a:chExt cx="0" cy="0"/>
+        </a:xfrm>
+      </p:grpSpPr>
+      <p:sp>
+        <p:nvSpPr>
+          <p:cNvPr id="2" name="Header Placeholder 1"/>
+          <p:cNvSpPr>
+            <a:spLocks noGrp="1"/>
+          </p:cNvSpPr>
+          <p:nvPr>
+            <p:ph type="hdr" sz="quarter"/>
+          </p:nvPr>
+        </p:nvSpPr>
+        <p:spPr>
+          <a:xfrm>
+            <a:off x="0" y="0"/>
+            <a:ext cx="2971800" cy="457200"/>
+          </a:xfrm>
+          <a:prstGeom prst="rect">
+            <a:avLst/>
+          </a:prstGeom>
+        </p:spPr>
+        <p:txBody>
+          <a:bodyPr vert="horz" lIns="91440" tIns="45720" rIns="91440" bIns="45720" rtlCol="0"/>
+          <a:lstStyle>
+            <a:lvl1pPr algn="l">
+              <a:defRPr sz="1200"/>
+            </a:lvl1pPr>
+          </a:lstStyle>
+          <a:p>
+            <a:endParaRPr lang="en-US"/>
+          </a:p>
+        </p:txBody>
+      </p:sp>
+      <p:sp>
+        <p:nvSpPr>
+          <p:cNvPr id="3" name="Date Placeholder 2"/>
+          <p:cNvSpPr>
+            <a:spLocks noGrp="1"/>
+          </p:cNvSpPr>
+          <p:nvPr>
+            <p:ph type="dt" idx="1"/>
+          </p:nvPr>
+        </p:nvSpPr>
+        <p:spPr>
+          <a:xfrm>
+            <a:off x="3884613" y="0"/>
+            <a:ext cx="2971800" cy="457200"/>
+          </a:xfrm>
+          <a:prstGeom prst="rect">
+            <a:avLst/>
+          </a:prstGeom>
+        </p:spPr>
+        <p:txBody>
+          <a:bodyPr vert="horz" lIns="91440" tIns="45720" rIns="91440" bIns="45720" rtlCol="0"/>
+          <a:lstStyle>
+            <a:lvl1pPr algn="r">
+              <a:defRPr sz="1200"/>
+            </a:lvl1pPr>
+          </a:lstStyle>
+          <a:p>
+            <a:fld id="{0F89C1C7-3DCD-1040-A9CF-14679D8B5DDD}" type="datetimeFigureOut">
+              <a:rPr lang="en-US" smtClean="0"/>
+              <a:t>10/17/16</a:t>
+            </a:fld>
+            <a:endParaRPr lang="en-US"/>
+          </a:p>
+        </p:txBody>
+      </p:sp>
+      <p:sp>
+        <p:nvSpPr>
+          <p:cNvPr id="4" name="Slide Image Placeholder 3"/>
+          <p:cNvSpPr>
+            <a:spLocks noGrp="1" noRot="1" noChangeAspect="1"/>
+          </p:cNvSpPr>
+          <p:nvPr>
+            <p:ph type="sldImg" idx="2"/>
+          </p:nvPr>
+        </p:nvSpPr>
+        <p:spPr>
+          <a:xfrm>
+            <a:off x="1143000" y="685800"/>
+            <a:ext cx="4572000" cy="3429000"/>
+          </a:xfrm>
+          <a:prstGeom prst="rect">
+            <a:avLst/>
+          </a:prstGeom>
+          <a:noFill/>
+          <a:ln w="12700">
+            <a:solidFill>
+              <a:prstClr val="black"/>
+            </a:solidFill>
+          </a:ln>
+        </p:spPr>
+        <p:txBody>
+          <a:bodyPr vert="horz" lIns="91440" tIns="45720" rIns="91440" bIns="45720" rtlCol="0" anchor="ctr"/>
+          <a:lstStyle/>
+          <a:p>
+            <a:endParaRPr lang="en-US"/>
+          </a:p>
+        </p:txBody>
+      </p:sp>
+      <p:sp>
+        <p:nvSpPr>
+          <p:cNvPr id="5" name="Notes Placeholder 4"/>
+          <p:cNvSpPr>
+            <a:spLocks noGrp="1"/>
+          </p:cNvSpPr>
+          <p:nvPr>
+            <p:ph type="body" sz="quarter" idx="3"/>
+          </p:nvPr>
+        </p:nvSpPr>
+        <p:spPr>
+          <a:xfrm>
+            <a:off x="685800" y="4343400"/>
+            <a:ext cx="5486400" cy="4114800"/>
+          </a:xfrm>
+          <a:prstGeom prst="rect">
+            <a:avLst/>
+          </a:prstGeom>
+        </p:spPr>
+        <p:txBody>
+          <a:bodyPr vert="horz" lIns="91440" tIns="45720" rIns="91440" bIns="45720" rtlCol="0"/>
+          <a:lstStyle/>
+          <a:p>
+            <a:pPr lvl="0"/>
+            <a:r>
+              <a:rPr lang="en-US" smtClean="0"/>
+              <a:t>Click to edit Master text styles</a:t>
+            </a:r>
+          </a:p>
+          <a:p>
+            <a:pPr lvl="1"/>
+            <a:r>
+              <a:rPr lang="en-US" smtClean="0"/>
+              <a:t>Second level</a:t>
+            </a:r>
+          </a:p>
+          <a:p>
+            <a:pPr lvl="2"/>
+            <a:r>
+              <a:rPr lang="en-US" smtClean="0"/>
+              <a:t>Third level</a:t>
+            </a:r>
+          </a:p>
+          <a:p>
+            <a:pPr lvl="3"/>
+            <a:r>
+              <a:rPr lang="en-US" smtClean="0"/>
+              <a:t>Fourth level</a:t>
+            </a:r>
+          </a:p>
+          <a:p>
+            <a:pPr lvl="4"/>
+            <a:r>
+              <a:rPr lang="en-US" smtClean="0"/>
+              <a:t>Fifth level</a:t>
+            </a:r>
+            <a:endParaRPr lang="en-US"/>
+          </a:p>
+        </p:txBody>
+      </p:sp>
+      <p:sp>
+        <p:nvSpPr>
+          <p:cNvPr id="6" name="Footer Placeholder 5"/>
+          <p:cNvSpPr>
+            <a:spLocks noGrp="1"/>
+          </p:cNvSpPr>
+          <p:nvPr>
+            <p:ph type="ftr" sz="quarter" idx="4"/>
+          </p:nvPr>
+        </p:nvSpPr>
+        <p:spPr>
+          <a:xfrm>
+            <a:off x="0" y="8685213"/>
+            <a:ext cx="2971800" cy="457200"/>
+          </a:xfrm>
+          <a:prstGeom prst="rect">
+            <a:avLst/>
+          </a:prstGeom>
+        </p:spPr>
+        <p:txBody>
+          <a:bodyPr vert="horz" lIns="91440" tIns="45720" rIns="91440" bIns="45720" rtlCol="0" anchor="b"/>
+          <a:lstStyle>
+            <a:lvl1pPr algn="l">
+              <a:defRPr sz="1200"/>
+            </a:lvl1pPr>
+          </a:lstStyle>
+          <a:p>
+            <a:endParaRPr lang="en-US"/>
+          </a:p>
+        </p:txBody>
+      </p:sp>
+      <p:sp>
+        <p:nvSpPr>
+          <p:cNvPr id="7" name="Slide Number Placeholder 6"/>
+          <p:cNvSpPr>
+            <a:spLocks noGrp="1"/>
+          </p:cNvSpPr>
+          <p:nvPr>
+            <p:ph type="sldNum" sz="quarter" idx="5"/>
+          </p:nvPr>
+        </p:nvSpPr>
+        <p:spPr>
+          <a:xfrm>
+            <a:off x="3884613" y="8685213"/>
+            <a:ext cx="2971800" cy="457200"/>
+          </a:xfrm>
+          <a:prstGeom prst="rect">
+            <a:avLst/>
+          </a:prstGeom>
+        </p:spPr>
+        <p:txBody>
+          <a:bodyPr vert="horz" lIns="91440" tIns="45720" rIns="91440" bIns="45720" rtlCol="0" anchor="b"/>
+          <a:lstStyle>
+            <a:lvl1pPr algn="r">
+              <a:defRPr sz="1200"/>
+            </a:lvl1pPr>
+          </a:lstStyle>
+          <a:p>
+            <a:fld id="{BB5E49A5-4136-284D-997B-48E1D791AD67}" type="slidenum">
+              <a:rPr lang="en-US" smtClean="0"/>
+              <a:t>‹#›</a:t>
+            </a:fld>
+            <a:endParaRPr lang="en-US"/>
+          </a:p>
+        </p:txBody>
+      </p:sp>
+    </p:spTree>
+    <p:extLst>
+      <p:ext uri="{BB962C8B-B14F-4D97-AF65-F5344CB8AC3E}">
+        <p14:creationId xmlns:p14="http://schemas.microsoft.com/office/powerpoint/2010/main" val="2623252185"/>
+      </p:ext>
+    </p:extLst>
+  </p:cSld>
+  <p:clrMap bg1="lt1" tx1="dk1" bg2="lt2" tx2="dk2" accent1="accent1" accent2="accent2" accent3="accent3" accent4="accent4" accent5="accent5" accent6="accent6" hlink="hlink" folHlink="folHlink"/>
+  <p:notesStyle>
+    <a:lvl1pPr marL="0" algn="l" defTabSz="457200" rtl="0" eaLnBrk="1" latinLnBrk="0" hangingPunct="1">
+      <a:defRPr sz="1200" kern="1200">
+        <a:solidFill>
+          <a:schemeClr val="tx1"/>
+        </a:solidFill>
+        <a:latin typeface="+mn-lt"/>
+        <a:ea typeface="+mn-ea"/>
+        <a:cs typeface="+mn-cs"/>
+      </a:defRPr>
+    </a:lvl1pPr>
+    <a:lvl2pPr marL="457200" algn="l" defTabSz="457200" rtl="0" eaLnBrk="1" latinLnBrk="0" hangingPunct="1">
+      <a:defRPr sz="1200" kern="1200">
+        <a:solidFill>
+          <a:schemeClr val="tx1"/>
+        </a:solidFill>
+        <a:latin typeface="+mn-lt"/>
+        <a:ea typeface="+mn-ea"/>
+        <a:cs typeface="+mn-cs"/>
+      </a:defRPr>
+    </a:lvl2pPr>
+    <a:lvl3pPr marL="914400" algn="l" defTabSz="457200" rtl="0" eaLnBrk="1" latinLnBrk="0" hangingPunct="1">
+      <a:defRPr sz="1200" kern="1200">
+        <a:solidFill>
+          <a:schemeClr val="tx1"/>
+        </a:solidFill>
+        <a:latin typeface="+mn-lt"/>
+        <a:ea typeface="+mn-ea"/>
+        <a:cs typeface="+mn-cs"/>
+      </a:defRPr>
+    </a:lvl3pPr>
+    <a:lvl4pPr marL="1371600" algn="l" defTabSz="457200" rtl="0" eaLnBrk="1" latinLnBrk="0" hangingPunct="1">
+      <a:defRPr sz="1200" kern="1200">
+        <a:solidFill>
+          <a:schemeClr val="tx1"/>
+        </a:solidFill>
+        <a:latin typeface="+mn-lt"/>
+        <a:ea typeface="+mn-ea"/>
+        <a:cs typeface="+mn-cs"/>
+      </a:defRPr>
+    </a:lvl4pPr>
+    <a:lvl5pPr marL="1828800" algn="l" defTabSz="457200" rtl="0" eaLnBrk="1" latinLnBrk="0" hangingPunct="1">
+      <a:defRPr sz="1200" kern="1200">
+        <a:solidFill>
+          <a:schemeClr val="tx1"/>
+        </a:solidFill>
+        <a:latin typeface="+mn-lt"/>
+        <a:ea typeface="+mn-ea"/>
+        <a:cs typeface="+mn-cs"/>
+      </a:defRPr>
+    </a:lvl5pPr>
+    <a:lvl6pPr marL="2286000" algn="l" defTabSz="457200" rtl="0" eaLnBrk="1" latinLnBrk="0" hangingPunct="1">
+      <a:defRPr sz="1200" kern="1200">
+        <a:solidFill>
+          <a:schemeClr val="tx1"/>
+        </a:solidFill>
+        <a:latin typeface="+mn-lt"/>
+        <a:ea typeface="+mn-ea"/>
+        <a:cs typeface="+mn-cs"/>
+      </a:defRPr>
+    </a:lvl6pPr>
+    <a:lvl7pPr marL="2743200" algn="l" defTabSz="457200" rtl="0" eaLnBrk="1" latinLnBrk="0" hangingPunct="1">
+      <a:defRPr sz="1200" kern="1200">
+        <a:solidFill>
+          <a:schemeClr val="tx1"/>
+        </a:solidFill>
+        <a:latin typeface="+mn-lt"/>
+        <a:ea typeface="+mn-ea"/>
+        <a:cs typeface="+mn-cs"/>
+      </a:defRPr>
+    </a:lvl7pPr>
+    <a:lvl8pPr marL="3200400" algn="l" defTabSz="457200" rtl="0" eaLnBrk="1" latinLnBrk="0" hangingPunct="1">
+      <a:defRPr sz="1200" kern="1200">
+        <a:solidFill>
+          <a:schemeClr val="tx1"/>
+        </a:solidFill>
+        <a:latin typeface="+mn-lt"/>
+        <a:ea typeface="+mn-ea"/>
+        <a:cs typeface="+mn-cs"/>
+      </a:defRPr>
+    </a:lvl8pPr>
+    <a:lvl9pPr marL="3657600" algn="l" defTabSz="457200" rtl="0" eaLnBrk="1" latinLnBrk="0" hangingPunct="1">
+      <a:defRPr sz="1200" kern="1200">
+        <a:solidFill>
+          <a:schemeClr val="tx1"/>
+        </a:solidFill>
+        <a:latin typeface="+mn-lt"/>
+        <a:ea typeface="+mn-ea"/>
+        <a:cs typeface="+mn-cs"/>
+      </a:defRPr>
+    </a:lvl9pPr>
+  </p:notesStyle>
+</p:notesMaster>
+</file>
+
+<file path=ppt/notesSlides/notesSlide1.xml><?xml version="1.0" encoding="utf-8"?>
+<p:notes xmlns:a="http://schemas.openxmlformats.org/drawingml/2006/main" xmlns:p="http://schemas.openxmlformats.org/presentationml/2006/main" xmlns:r="http://schemas.openxmlformats.org/officeDocument/2006/relationships">
+  <p:cSld>
+    <p:spTree>
+      <p:nvGrpSpPr>
+        <p:cNvPr id="1" name=""/>
+        <p:cNvGrpSpPr/>
+        <p:nvPr/>
+      </p:nvGrpSpPr>
+      <p:grpSpPr>
+        <a:xfrm>
+          <a:off x="0" y="0"/>
+          <a:ext cx="0" cy="0"/>
+          <a:chOff x="0" y="0"/>
+          <a:chExt cx="0" cy="0"/>
+        </a:xfrm>
+      </p:grpSpPr>
+      <p:sp>
+        <p:nvSpPr>
+          <p:cNvPr id="2" name="Slide Image Placeholder 1"/>
+          <p:cNvSpPr>
+            <a:spLocks noGrp="1"/>
+          </p:cNvSpPr>
+          <p:nvPr>
+            <p:ph type="sldImg" idx="2"/>
+          </p:nvPr>
+        </p:nvSpPr>
+        <p:spPr/>
+      </p:sp>
+      <p:sp>
+        <p:nvSpPr>
+          <p:cNvPr id="3" name="Notes Placeholder 2"/>
+          <p:cNvSpPr>
+            <a:spLocks noGrp="1"/>
+          </p:cNvSpPr>
+          <p:nvPr>
+            <p:ph type="body" idx="3" sz="quarter"/>
+          </p:nvPr>
+        </p:nvSpPr>
+        <p:spPr/>
+        <p:txBody>
+          <a:bodyPr/>
+          <a:lstStyle/>
+          <a:p>
+            <a:r>
+              <a:t>Session 2. Soften in, recap Session 1: you found your needs; tonight you give them a voice, not a complaint, not a hint, a desire spoken so it can be met. Go-round.</a:t>
+            </a:r>
+          </a:p>
+        </p:txBody>
+      </p:sp>
+      <p:sp>
+        <p:nvSpPr>
+          <p:cNvPr id="4" name="Slide Number Placeholder 3"/>
+          <p:cNvSpPr>
+            <a:spLocks noGrp="1"/>
+          </p:cNvSpPr>
+          <p:nvPr>
+            <p:ph type="sldNum" idx="5" sz="quarter"/>
+          </p:nvPr>
+        </p:nvSpPr>
+        <p:spPr/>
+      </p:sp>
+    </p:spTree>
+  </p:cSld>
+  <p:clrMapOvr>
+    <a:masterClrMapping/>
+  </p:clrMapOvr>
+</p:notes>
+</file>
+
+<file path=ppt/notesSlides/notesSlide10.xml><?xml version="1.0" encoding="utf-8"?>
+<p:notes xmlns:a="http://schemas.openxmlformats.org/drawingml/2006/main" xmlns:p="http://schemas.openxmlformats.org/presentationml/2006/main" xmlns:r="http://schemas.openxmlformats.org/officeDocument/2006/relationships">
+  <p:cSld>
+    <p:spTree>
+      <p:nvGrpSpPr>
+        <p:cNvPr id="1" name=""/>
+        <p:cNvGrpSpPr/>
+        <p:nvPr/>
+      </p:nvGrpSpPr>
+      <p:grpSpPr>
+        <a:xfrm>
+          <a:off x="0" y="0"/>
+          <a:ext cx="0" cy="0"/>
+          <a:chOff x="0" y="0"/>
+          <a:chExt cx="0" cy="0"/>
+        </a:xfrm>
+      </p:grpSpPr>
+      <p:sp>
+        <p:nvSpPr>
+          <p:cNvPr id="2" name="Slide Image Placeholder 1"/>
+          <p:cNvSpPr>
+            <a:spLocks noGrp="1"/>
+          </p:cNvSpPr>
+          <p:nvPr>
+            <p:ph type="sldImg" idx="2"/>
+          </p:nvPr>
+        </p:nvSpPr>
+        <p:spPr/>
+      </p:sp>
+      <p:sp>
+        <p:nvSpPr>
+          <p:cNvPr id="3" name="Notes Placeholder 2"/>
+          <p:cNvSpPr>
+            <a:spLocks noGrp="1"/>
+          </p:cNvSpPr>
+          <p:nvPr>
+            <p:ph type="body" idx="3" sz="quarter"/>
+          </p:nvPr>
+        </p:nvSpPr>
+        <p:spPr/>
+        <p:txBody>
+          <a:bodyPr/>
+          <a:lstStyle/>
+          <a:p>
+            <a:r>
+              <a:t>Broadcast. In pairs, build your ask in all four steps; partner receives it warmly in character and answers step 4. No apologising, say it like it's allowed. Swap. Main-room: what surprised you about asking that way?</a:t>
+            </a:r>
+          </a:p>
+        </p:txBody>
+      </p:sp>
+      <p:sp>
+        <p:nvSpPr>
+          <p:cNvPr id="4" name="Slide Number Placeholder 3"/>
+          <p:cNvSpPr>
+            <a:spLocks noGrp="1"/>
+          </p:cNvSpPr>
+          <p:nvPr>
+            <p:ph type="sldNum" idx="5" sz="quarter"/>
+          </p:nvPr>
+        </p:nvSpPr>
+        <p:spPr/>
+      </p:sp>
+    </p:spTree>
+  </p:cSld>
+  <p:clrMapOvr>
+    <a:masterClrMapping/>
+  </p:clrMapOvr>
+</p:notes>
+</file>
+
+<file path=ppt/notesSlides/notesSlide11.xml><?xml version="1.0" encoding="utf-8"?>
+<p:notes xmlns:a="http://schemas.openxmlformats.org/drawingml/2006/main" xmlns:p="http://schemas.openxmlformats.org/presentationml/2006/main" xmlns:r="http://schemas.openxmlformats.org/officeDocument/2006/relationships">
+  <p:cSld>
+    <p:spTree>
+      <p:nvGrpSpPr>
+        <p:cNvPr id="1" name=""/>
+        <p:cNvGrpSpPr/>
+        <p:nvPr/>
+      </p:nvGrpSpPr>
+      <p:grpSpPr>
+        <a:xfrm>
+          <a:off x="0" y="0"/>
+          <a:ext cx="0" cy="0"/>
+          <a:chOff x="0" y="0"/>
+          <a:chExt cx="0" cy="0"/>
+        </a:xfrm>
+      </p:grpSpPr>
+      <p:sp>
+        <p:nvSpPr>
+          <p:cNvPr id="2" name="Slide Image Placeholder 1"/>
+          <p:cNvSpPr>
+            <a:spLocks noGrp="1"/>
+          </p:cNvSpPr>
+          <p:nvPr>
+            <p:ph type="sldImg" idx="2"/>
+          </p:nvPr>
+        </p:nvSpPr>
+        <p:spPr/>
+      </p:sp>
+      <p:sp>
+        <p:nvSpPr>
+          <p:cNvPr id="3" name="Notes Placeholder 2"/>
+          <p:cNvSpPr>
+            <a:spLocks noGrp="1"/>
+          </p:cNvSpPr>
+          <p:nvPr>
+            <p:ph type="body" idx="3" sz="quarter"/>
+          </p:nvPr>
+        </p:nvSpPr>
+        <p:spPr/>
+        <p:txBody>
+          <a:bodyPr/>
+          <a:lstStyle/>
+          <a:p>
+            <a:r>
+              <a:t>A demand makes him wrong and he stops trying; an invitation hands him a way to be your hero. Assume he wants to give; ask for the action, not mind-reading; make it winnable, and let him win his own way.</a:t>
+            </a:r>
+          </a:p>
+        </p:txBody>
+      </p:sp>
+      <p:sp>
+        <p:nvSpPr>
+          <p:cNvPr id="4" name="Slide Number Placeholder 3"/>
+          <p:cNvSpPr>
+            <a:spLocks noGrp="1"/>
+          </p:cNvSpPr>
+          <p:nvPr>
+            <p:ph type="sldNum" idx="5" sz="quarter"/>
+          </p:nvPr>
+        </p:nvSpPr>
+        <p:spPr/>
+      </p:sp>
+    </p:spTree>
+  </p:cSld>
+  <p:clrMapOvr>
+    <a:masterClrMapping/>
+  </p:clrMapOvr>
+</p:notes>
+</file>
+
+<file path=ppt/notesSlides/notesSlide12.xml><?xml version="1.0" encoding="utf-8"?>
+<p:notes xmlns:a="http://schemas.openxmlformats.org/drawingml/2006/main" xmlns:p="http://schemas.openxmlformats.org/presentationml/2006/main" xmlns:r="http://schemas.openxmlformats.org/officeDocument/2006/relationships">
+  <p:cSld>
+    <p:spTree>
+      <p:nvGrpSpPr>
+        <p:cNvPr id="1" name=""/>
+        <p:cNvGrpSpPr/>
+        <p:nvPr/>
+      </p:nvGrpSpPr>
+      <p:grpSpPr>
+        <a:xfrm>
+          <a:off x="0" y="0"/>
+          <a:ext cx="0" cy="0"/>
+          <a:chOff x="0" y="0"/>
+          <a:chExt cx="0" cy="0"/>
+        </a:xfrm>
+      </p:grpSpPr>
+      <p:sp>
+        <p:nvSpPr>
+          <p:cNvPr id="2" name="Slide Image Placeholder 1"/>
+          <p:cNvSpPr>
+            <a:spLocks noGrp="1"/>
+          </p:cNvSpPr>
+          <p:nvPr>
+            <p:ph type="sldImg" idx="2"/>
+          </p:nvPr>
+        </p:nvSpPr>
+        <p:spPr/>
+      </p:sp>
+      <p:sp>
+        <p:nvSpPr>
+          <p:cNvPr id="3" name="Notes Placeholder 2"/>
+          <p:cNvSpPr>
+            <a:spLocks noGrp="1"/>
+          </p:cNvSpPr>
+          <p:nvPr>
+            <p:ph type="body" idx="3" sz="quarter"/>
+          </p:nvPr>
+        </p:nvSpPr>
+        <p:spPr/>
+        <p:txBody>
+          <a:bodyPr/>
+          <a:lstStyle/>
+          <a:p>
+            <a:r>
+              <a:t>Armstrong's Appreciation Equation: notice what he already does before you ask for the next thing; give it in his currency; then let him see it landed. That's the fuel.</a:t>
+            </a:r>
+          </a:p>
+        </p:txBody>
+      </p:sp>
+      <p:sp>
+        <p:nvSpPr>
+          <p:cNvPr id="4" name="Slide Number Placeholder 3"/>
+          <p:cNvSpPr>
+            <a:spLocks noGrp="1"/>
+          </p:cNvSpPr>
+          <p:nvPr>
+            <p:ph type="sldNum" idx="5" sz="quarter"/>
+          </p:nvPr>
+        </p:nvSpPr>
+        <p:spPr/>
+      </p:sp>
+    </p:spTree>
+  </p:cSld>
+  <p:clrMapOvr>
+    <a:masterClrMapping/>
+  </p:clrMapOvr>
+</p:notes>
+</file>
+
+<file path=ppt/notesSlides/notesSlide13.xml><?xml version="1.0" encoding="utf-8"?>
+<p:notes xmlns:a="http://schemas.openxmlformats.org/drawingml/2006/main" xmlns:p="http://schemas.openxmlformats.org/presentationml/2006/main" xmlns:r="http://schemas.openxmlformats.org/officeDocument/2006/relationships">
+  <p:cSld>
+    <p:spTree>
+      <p:nvGrpSpPr>
+        <p:cNvPr id="1" name=""/>
+        <p:cNvGrpSpPr/>
+        <p:nvPr/>
+      </p:nvGrpSpPr>
+      <p:grpSpPr>
+        <a:xfrm>
+          <a:off x="0" y="0"/>
+          <a:ext cx="0" cy="0"/>
+          <a:chOff x="0" y="0"/>
+          <a:chExt cx="0" cy="0"/>
+        </a:xfrm>
+      </p:grpSpPr>
+      <p:sp>
+        <p:nvSpPr>
+          <p:cNvPr id="2" name="Slide Image Placeholder 1"/>
+          <p:cNvSpPr>
+            <a:spLocks noGrp="1"/>
+          </p:cNvSpPr>
+          <p:nvPr>
+            <p:ph type="sldImg" idx="2"/>
+          </p:nvPr>
+        </p:nvSpPr>
+        <p:spPr/>
+      </p:sp>
+      <p:sp>
+        <p:nvSpPr>
+          <p:cNvPr id="3" name="Notes Placeholder 2"/>
+          <p:cNvSpPr>
+            <a:spLocks noGrp="1"/>
+          </p:cNvSpPr>
+          <p:nvPr>
+            <p:ph type="body" idx="3" sz="quarter"/>
+          </p:nvPr>
+        </p:nvSpPr>
+        <p:spPr/>
+        <p:txBody>
+          <a:bodyPr/>
+          <a:lstStyle/>
+          <a:p>
+            <a:r>
+              <a:t>The loop that works: clear invitation, he gives, you receive and show it landed, he wants to give more. Same man, same marriage, you changed how you asked and how you received.</a:t>
+            </a:r>
+          </a:p>
+        </p:txBody>
+      </p:sp>
+      <p:sp>
+        <p:nvSpPr>
+          <p:cNvPr id="4" name="Slide Number Placeholder 3"/>
+          <p:cNvSpPr>
+            <a:spLocks noGrp="1"/>
+          </p:cNvSpPr>
+          <p:nvPr>
+            <p:ph type="sldNum" idx="5" sz="quarter"/>
+          </p:nvPr>
+        </p:nvSpPr>
+        <p:spPr/>
+      </p:sp>
+    </p:spTree>
+  </p:cSld>
+  <p:clrMapOvr>
+    <a:masterClrMapping/>
+  </p:clrMapOvr>
+</p:notes>
+</file>
+
+<file path=ppt/notesSlides/notesSlide14.xml><?xml version="1.0" encoding="utf-8"?>
+<p:notes xmlns:a="http://schemas.openxmlformats.org/drawingml/2006/main" xmlns:p="http://schemas.openxmlformats.org/presentationml/2006/main" xmlns:r="http://schemas.openxmlformats.org/officeDocument/2006/relationships">
+  <p:cSld>
+    <p:spTree>
+      <p:nvGrpSpPr>
+        <p:cNvPr id="1" name=""/>
+        <p:cNvGrpSpPr/>
+        <p:nvPr/>
+      </p:nvGrpSpPr>
+      <p:grpSpPr>
+        <a:xfrm>
+          <a:off x="0" y="0"/>
+          <a:ext cx="0" cy="0"/>
+          <a:chOff x="0" y="0"/>
+          <a:chExt cx="0" cy="0"/>
+        </a:xfrm>
+      </p:grpSpPr>
+      <p:sp>
+        <p:nvSpPr>
+          <p:cNvPr id="2" name="Slide Image Placeholder 1"/>
+          <p:cNvSpPr>
+            <a:spLocks noGrp="1"/>
+          </p:cNvSpPr>
+          <p:nvPr>
+            <p:ph type="sldImg" idx="2"/>
+          </p:nvPr>
+        </p:nvSpPr>
+        <p:spPr/>
+      </p:sp>
+      <p:sp>
+        <p:nvSpPr>
+          <p:cNvPr id="3" name="Notes Placeholder 2"/>
+          <p:cNvSpPr>
+            <a:spLocks noGrp="1"/>
+          </p:cNvSpPr>
+          <p:nvPr>
+            <p:ph type="body" idx="3" sz="quarter"/>
+          </p:nvPr>
+        </p:nvSpPr>
+        <p:spPr/>
+        <p:txBody>
+          <a:bodyPr/>
+          <a:lstStyle/>
+          <a:p>
+            <a:r>
+              <a:t>Stop deflecting the gift; let the compliment land. You can't ask for intimacy from an empty tank. Receiving is half the skill.</a:t>
+            </a:r>
+          </a:p>
+        </p:txBody>
+      </p:sp>
+      <p:sp>
+        <p:nvSpPr>
+          <p:cNvPr id="4" name="Slide Number Placeholder 3"/>
+          <p:cNvSpPr>
+            <a:spLocks noGrp="1"/>
+          </p:cNvSpPr>
+          <p:nvPr>
+            <p:ph type="sldNum" idx="5" sz="quarter"/>
+          </p:nvPr>
+        </p:nvSpPr>
+        <p:spPr/>
+      </p:sp>
+    </p:spTree>
+  </p:cSld>
+  <p:clrMapOvr>
+    <a:masterClrMapping/>
+  </p:clrMapOvr>
+</p:notes>
+</file>
+
+<file path=ppt/notesSlides/notesSlide15.xml><?xml version="1.0" encoding="utf-8"?>
+<p:notes xmlns:a="http://schemas.openxmlformats.org/drawingml/2006/main" xmlns:p="http://schemas.openxmlformats.org/presentationml/2006/main" xmlns:r="http://schemas.openxmlformats.org/officeDocument/2006/relationships">
+  <p:cSld>
+    <p:spTree>
+      <p:nvGrpSpPr>
+        <p:cNvPr id="1" name=""/>
+        <p:cNvGrpSpPr/>
+        <p:nvPr/>
+      </p:nvGrpSpPr>
+      <p:grpSpPr>
+        <a:xfrm>
+          <a:off x="0" y="0"/>
+          <a:ext cx="0" cy="0"/>
+          <a:chOff x="0" y="0"/>
+          <a:chExt cx="0" cy="0"/>
+        </a:xfrm>
+      </p:grpSpPr>
+      <p:sp>
+        <p:nvSpPr>
+          <p:cNvPr id="2" name="Slide Image Placeholder 1"/>
+          <p:cNvSpPr>
+            <a:spLocks noGrp="1"/>
+          </p:cNvSpPr>
+          <p:nvPr>
+            <p:ph type="sldImg" idx="2"/>
+          </p:nvPr>
+        </p:nvSpPr>
+        <p:spPr/>
+      </p:sp>
+      <p:sp>
+        <p:nvSpPr>
+          <p:cNvPr id="3" name="Notes Placeholder 2"/>
+          <p:cNvSpPr>
+            <a:spLocks noGrp="1"/>
+          </p:cNvSpPr>
+          <p:nvPr>
+            <p:ph type="body" idx="3" sz="quarter"/>
+          </p:nvPr>
+        </p:nvSpPr>
+        <p:spPr/>
+        <p:txBody>
+          <a:bodyPr/>
+          <a:lstStyle/>
+          <a:p>
+            <a:r>
+              <a:t>Broadcast. In pairs, say one want as a demand first ('You never...'), notice your partner's face; then as an invitation ('I'd so love it if you would...') and show how it would land ('...and it would make me feel...'). Partner says which made them want to give. Swap. Main-room: which were you more used to?</a:t>
+            </a:r>
+          </a:p>
+        </p:txBody>
+      </p:sp>
+      <p:sp>
+        <p:nvSpPr>
+          <p:cNvPr id="4" name="Slide Number Placeholder 3"/>
+          <p:cNvSpPr>
+            <a:spLocks noGrp="1"/>
+          </p:cNvSpPr>
+          <p:nvPr>
+            <p:ph type="sldNum" idx="5" sz="quarter"/>
+          </p:nvPr>
+        </p:nvSpPr>
+        <p:spPr/>
+      </p:sp>
+    </p:spTree>
+  </p:cSld>
+  <p:clrMapOvr>
+    <a:masterClrMapping/>
+  </p:clrMapOvr>
+</p:notes>
+</file>
+
+<file path=ppt/notesSlides/notesSlide16.xml><?xml version="1.0" encoding="utf-8"?>
+<p:notes xmlns:a="http://schemas.openxmlformats.org/drawingml/2006/main" xmlns:p="http://schemas.openxmlformats.org/presentationml/2006/main" xmlns:r="http://schemas.openxmlformats.org/officeDocument/2006/relationships">
+  <p:cSld>
+    <p:spTree>
+      <p:nvGrpSpPr>
+        <p:cNvPr id="1" name=""/>
+        <p:cNvGrpSpPr/>
+        <p:nvPr/>
+      </p:nvGrpSpPr>
+      <p:grpSpPr>
+        <a:xfrm>
+          <a:off x="0" y="0"/>
+          <a:ext cx="0" cy="0"/>
+          <a:chOff x="0" y="0"/>
+          <a:chExt cx="0" cy="0"/>
+        </a:xfrm>
+      </p:grpSpPr>
+      <p:sp>
+        <p:nvSpPr>
+          <p:cNvPr id="2" name="Slide Image Placeholder 1"/>
+          <p:cNvSpPr>
+            <a:spLocks noGrp="1"/>
+          </p:cNvSpPr>
+          <p:nvPr>
+            <p:ph type="sldImg" idx="2"/>
+          </p:nvPr>
+        </p:nvSpPr>
+        <p:spPr/>
+      </p:sp>
+      <p:sp>
+        <p:nvSpPr>
+          <p:cNvPr id="3" name="Notes Placeholder 2"/>
+          <p:cNvSpPr>
+            <a:spLocks noGrp="1"/>
+          </p:cNvSpPr>
+          <p:nvPr>
+            <p:ph type="body" idx="3" sz="quarter"/>
+          </p:nvPr>
+        </p:nvSpPr>
+        <p:spPr/>
+        <p:txBody>
+          <a:bodyPr/>
+          <a:lstStyle/>
+          <a:p>
+            <a:r>
+              <a:t>Claiming round: 'This week, the one clean want I'm going to actually say is...' Circle answers: You're allowed.</a:t>
+            </a:r>
+          </a:p>
+        </p:txBody>
+      </p:sp>
+      <p:sp>
+        <p:nvSpPr>
+          <p:cNvPr id="4" name="Slide Number Placeholder 3"/>
+          <p:cNvSpPr>
+            <a:spLocks noGrp="1"/>
+          </p:cNvSpPr>
+          <p:nvPr>
+            <p:ph type="sldNum" idx="5" sz="quarter"/>
+          </p:nvPr>
+        </p:nvSpPr>
+        <p:spPr/>
+      </p:sp>
+    </p:spTree>
+  </p:cSld>
+  <p:clrMapOvr>
+    <a:masterClrMapping/>
+  </p:clrMapOvr>
+</p:notes>
+</file>
+
+<file path=ppt/notesSlides/notesSlide17.xml><?xml version="1.0" encoding="utf-8"?>
+<p:notes xmlns:a="http://schemas.openxmlformats.org/drawingml/2006/main" xmlns:p="http://schemas.openxmlformats.org/presentationml/2006/main" xmlns:r="http://schemas.openxmlformats.org/officeDocument/2006/relationships">
+  <p:cSld>
+    <p:spTree>
+      <p:nvGrpSpPr>
+        <p:cNvPr id="1" name=""/>
+        <p:cNvGrpSpPr/>
+        <p:nvPr/>
+      </p:nvGrpSpPr>
+      <p:grpSpPr>
+        <a:xfrm>
+          <a:off x="0" y="0"/>
+          <a:ext cx="0" cy="0"/>
+          <a:chOff x="0" y="0"/>
+          <a:chExt cx="0" cy="0"/>
+        </a:xfrm>
+      </p:grpSpPr>
+      <p:sp>
+        <p:nvSpPr>
+          <p:cNvPr id="2" name="Slide Image Placeholder 1"/>
+          <p:cNvSpPr>
+            <a:spLocks noGrp="1"/>
+          </p:cNvSpPr>
+          <p:nvPr>
+            <p:ph type="sldImg" idx="2"/>
+          </p:nvPr>
+        </p:nvSpPr>
+        <p:spPr/>
+      </p:sp>
+      <p:sp>
+        <p:nvSpPr>
+          <p:cNvPr id="3" name="Notes Placeholder 2"/>
+          <p:cNvSpPr>
+            <a:spLocks noGrp="1"/>
+          </p:cNvSpPr>
+          <p:nvPr>
+            <p:ph type="body" idx="3" sz="quarter"/>
+          </p:nvPr>
+        </p:nvSpPr>
+        <p:spPr/>
+        <p:txBody>
+          <a:bodyPr/>
+          <a:lstStyle/>
+          <a:p>
+            <a:r>
+              <a:t>Take-home: one clean, specific, appreciation-first request a day; watch the generosity come back; you're teaching the people who love you how to succeed at loving you. Close.</a:t>
+            </a:r>
+          </a:p>
+        </p:txBody>
+      </p:sp>
+      <p:sp>
+        <p:nvSpPr>
+          <p:cNvPr id="4" name="Slide Number Placeholder 3"/>
+          <p:cNvSpPr>
+            <a:spLocks noGrp="1"/>
+          </p:cNvSpPr>
+          <p:nvPr>
+            <p:ph type="sldNum" idx="5" sz="quarter"/>
+          </p:nvPr>
+        </p:nvSpPr>
+        <p:spPr/>
+      </p:sp>
+    </p:spTree>
+  </p:cSld>
+  <p:clrMapOvr>
+    <a:masterClrMapping/>
+  </p:clrMapOvr>
+</p:notes>
+</file>
+
+<file path=ppt/notesSlides/notesSlide2.xml><?xml version="1.0" encoding="utf-8"?>
+<p:notes xmlns:a="http://schemas.openxmlformats.org/drawingml/2006/main" xmlns:p="http://schemas.openxmlformats.org/presentationml/2006/main" xmlns:r="http://schemas.openxmlformats.org/officeDocument/2006/relationships">
+  <p:cSld>
+    <p:spTree>
+      <p:nvGrpSpPr>
+        <p:cNvPr id="1" name=""/>
+        <p:cNvGrpSpPr/>
+        <p:nvPr/>
+      </p:nvGrpSpPr>
+      <p:grpSpPr>
+        <a:xfrm>
+          <a:off x="0" y="0"/>
+          <a:ext cx="0" cy="0"/>
+          <a:chOff x="0" y="0"/>
+          <a:chExt cx="0" cy="0"/>
+        </a:xfrm>
+      </p:grpSpPr>
+      <p:sp>
+        <p:nvSpPr>
+          <p:cNvPr id="2" name="Slide Image Placeholder 1"/>
+          <p:cNvSpPr>
+            <a:spLocks noGrp="1"/>
+          </p:cNvSpPr>
+          <p:nvPr>
+            <p:ph type="sldImg" idx="2"/>
+          </p:nvPr>
+        </p:nvSpPr>
+        <p:spPr/>
+      </p:sp>
+      <p:sp>
+        <p:nvSpPr>
+          <p:cNvPr id="3" name="Notes Placeholder 2"/>
+          <p:cNvSpPr>
+            <a:spLocks noGrp="1"/>
+          </p:cNvSpPr>
+          <p:nvPr>
+            <p:ph type="body" idx="3" sz="quarter"/>
+          </p:nvPr>
+        </p:nvSpPr>
+        <p:spPr/>
+        <p:txBody>
+          <a:bodyPr/>
+          <a:lstStyle/>
+          <a:p>
+            <a:r>
+              <a:t>Tonight we give her a voice. Frame: asking in a way that inspires.</a:t>
+            </a:r>
+          </a:p>
+        </p:txBody>
+      </p:sp>
+      <p:sp>
+        <p:nvSpPr>
+          <p:cNvPr id="4" name="Slide Number Placeholder 3"/>
+          <p:cNvSpPr>
+            <a:spLocks noGrp="1"/>
+          </p:cNvSpPr>
+          <p:nvPr>
+            <p:ph type="sldNum" idx="5" sz="quarter"/>
+          </p:nvPr>
+        </p:nvSpPr>
+        <p:spPr/>
+      </p:sp>
+    </p:spTree>
+  </p:cSld>
+  <p:clrMapOvr>
+    <a:masterClrMapping/>
+  </p:clrMapOvr>
+</p:notes>
+</file>
+
+<file path=ppt/notesSlides/notesSlide3.xml><?xml version="1.0" encoding="utf-8"?>
+<p:notes xmlns:a="http://schemas.openxmlformats.org/drawingml/2006/main" xmlns:p="http://schemas.openxmlformats.org/presentationml/2006/main" xmlns:r="http://schemas.openxmlformats.org/officeDocument/2006/relationships">
+  <p:cSld>
+    <p:spTree>
+      <p:nvGrpSpPr>
+        <p:cNvPr id="1" name=""/>
+        <p:cNvGrpSpPr/>
+        <p:nvPr/>
+      </p:nvGrpSpPr>
+      <p:grpSpPr>
+        <a:xfrm>
+          <a:off x="0" y="0"/>
+          <a:ext cx="0" cy="0"/>
+          <a:chOff x="0" y="0"/>
+          <a:chExt cx="0" cy="0"/>
+        </a:xfrm>
+      </p:grpSpPr>
+      <p:sp>
+        <p:nvSpPr>
+          <p:cNvPr id="2" name="Slide Image Placeholder 1"/>
+          <p:cNvSpPr>
+            <a:spLocks noGrp="1"/>
+          </p:cNvSpPr>
+          <p:nvPr>
+            <p:ph type="sldImg" idx="2"/>
+          </p:nvPr>
+        </p:nvSpPr>
+        <p:spPr/>
+      </p:sp>
+      <p:sp>
+        <p:nvSpPr>
+          <p:cNvPr id="3" name="Notes Placeholder 2"/>
+          <p:cNvSpPr>
+            <a:spLocks noGrp="1"/>
+          </p:cNvSpPr>
+          <p:nvPr>
+            <p:ph type="body" idx="3" sz="quarter"/>
+          </p:nvPr>
+        </p:nvSpPr>
+        <p:spPr/>
+        <p:txBody>
+          <a:bodyPr/>
+          <a:lstStyle/>
+          <a:p>
+            <a:r>
+              <a:t>Go-round: one desire I found last time was...</a:t>
+            </a:r>
+          </a:p>
+        </p:txBody>
+      </p:sp>
+      <p:sp>
+        <p:nvSpPr>
+          <p:cNvPr id="4" name="Slide Number Placeholder 3"/>
+          <p:cNvSpPr>
+            <a:spLocks noGrp="1"/>
+          </p:cNvSpPr>
+          <p:nvPr>
+            <p:ph type="sldNum" idx="5" sz="quarter"/>
+          </p:nvPr>
+        </p:nvSpPr>
+        <p:spPr/>
+      </p:sp>
+    </p:spTree>
+  </p:cSld>
+  <p:clrMapOvr>
+    <a:masterClrMapping/>
+  </p:clrMapOvr>
+</p:notes>
+</file>
+
+<file path=ppt/notesSlides/notesSlide4.xml><?xml version="1.0" encoding="utf-8"?>
+<p:notes xmlns:a="http://schemas.openxmlformats.org/drawingml/2006/main" xmlns:p="http://schemas.openxmlformats.org/presentationml/2006/main" xmlns:r="http://schemas.openxmlformats.org/officeDocument/2006/relationships">
+  <p:cSld>
+    <p:spTree>
+      <p:nvGrpSpPr>
+        <p:cNvPr id="1" name=""/>
+        <p:cNvGrpSpPr/>
+        <p:nvPr/>
+      </p:nvGrpSpPr>
+      <p:grpSpPr>
+        <a:xfrm>
+          <a:off x="0" y="0"/>
+          <a:ext cx="0" cy="0"/>
+          <a:chOff x="0" y="0"/>
+          <a:chExt cx="0" cy="0"/>
+        </a:xfrm>
+      </p:grpSpPr>
+      <p:sp>
+        <p:nvSpPr>
+          <p:cNvPr id="2" name="Slide Image Placeholder 1"/>
+          <p:cNvSpPr>
+            <a:spLocks noGrp="1"/>
+          </p:cNvSpPr>
+          <p:nvPr>
+            <p:ph type="sldImg" idx="2"/>
+          </p:nvPr>
+        </p:nvSpPr>
+        <p:spPr/>
+      </p:sp>
+      <p:sp>
+        <p:nvSpPr>
+          <p:cNvPr id="3" name="Notes Placeholder 2"/>
+          <p:cNvSpPr>
+            <a:spLocks noGrp="1"/>
+          </p:cNvSpPr>
+          <p:nvPr>
+            <p:ph type="body" idx="3" sz="quarter"/>
+          </p:nvPr>
+        </p:nvSpPr>
+        <p:spPr/>
+        <p:txBody>
+          <a:bodyPr/>
+          <a:lstStyle/>
+          <a:p>
+            <a:r>
+              <a:t>Alison Armstrong: you live in diffuse awareness, aware of everything at once; he lives more in single focus, one thing at a time. So when you share, he hears information, not a request. Neither of you is broken.</a:t>
+            </a:r>
+          </a:p>
+        </p:txBody>
+      </p:sp>
+      <p:sp>
+        <p:nvSpPr>
+          <p:cNvPr id="4" name="Slide Number Placeholder 3"/>
+          <p:cNvSpPr>
+            <a:spLocks noGrp="1"/>
+          </p:cNvSpPr>
+          <p:nvPr>
+            <p:ph type="sldNum" idx="5" sz="quarter"/>
+          </p:nvPr>
+        </p:nvSpPr>
+        <p:spPr/>
+      </p:sp>
+    </p:spTree>
+  </p:cSld>
+  <p:clrMapOvr>
+    <a:masterClrMapping/>
+  </p:clrMapOvr>
+</p:notes>
+</file>
+
+<file path=ppt/notesSlides/notesSlide5.xml><?xml version="1.0" encoding="utf-8"?>
+<p:notes xmlns:a="http://schemas.openxmlformats.org/drawingml/2006/main" xmlns:p="http://schemas.openxmlformats.org/presentationml/2006/main" xmlns:r="http://schemas.openxmlformats.org/officeDocument/2006/relationships">
+  <p:cSld>
+    <p:spTree>
+      <p:nvGrpSpPr>
+        <p:cNvPr id="1" name=""/>
+        <p:cNvGrpSpPr/>
+        <p:nvPr/>
+      </p:nvGrpSpPr>
+      <p:grpSpPr>
+        <a:xfrm>
+          <a:off x="0" y="0"/>
+          <a:ext cx="0" cy="0"/>
+          <a:chOff x="0" y="0"/>
+          <a:chExt cx="0" cy="0"/>
+        </a:xfrm>
+      </p:grpSpPr>
+      <p:sp>
+        <p:nvSpPr>
+          <p:cNvPr id="2" name="Slide Image Placeholder 1"/>
+          <p:cNvSpPr>
+            <a:spLocks noGrp="1"/>
+          </p:cNvSpPr>
+          <p:nvPr>
+            <p:ph type="sldImg" idx="2"/>
+          </p:nvPr>
+        </p:nvSpPr>
+        <p:spPr/>
+      </p:sp>
+      <p:sp>
+        <p:nvSpPr>
+          <p:cNvPr id="3" name="Notes Placeholder 2"/>
+          <p:cNvSpPr>
+            <a:spLocks noGrp="1"/>
+          </p:cNvSpPr>
+          <p:nvPr>
+            <p:ph type="body" idx="3" sz="quarter"/>
+          </p:nvPr>
+        </p:nvSpPr>
+        <p:spPr/>
+        <p:txBody>
+          <a:bodyPr/>
+          <a:lstStyle/>
+          <a:p>
+            <a:r>
+              <a:t>A hundred diffuse hints land as noise. One clear want lands as a request.</a:t>
+            </a:r>
+          </a:p>
+        </p:txBody>
+      </p:sp>
+      <p:sp>
+        <p:nvSpPr>
+          <p:cNvPr id="4" name="Slide Number Placeholder 3"/>
+          <p:cNvSpPr>
+            <a:spLocks noGrp="1"/>
+          </p:cNvSpPr>
+          <p:nvPr>
+            <p:ph type="sldNum" idx="5" sz="quarter"/>
+          </p:nvPr>
+        </p:nvSpPr>
+        <p:spPr/>
+      </p:sp>
+    </p:spTree>
+  </p:cSld>
+  <p:clrMapOvr>
+    <a:masterClrMapping/>
+  </p:clrMapOvr>
+</p:notes>
+</file>
+
+<file path=ppt/notesSlides/notesSlide6.xml><?xml version="1.0" encoding="utf-8"?>
+<p:notes xmlns:a="http://schemas.openxmlformats.org/drawingml/2006/main" xmlns:p="http://schemas.openxmlformats.org/presentationml/2006/main" xmlns:r="http://schemas.openxmlformats.org/officeDocument/2006/relationships">
+  <p:cSld>
+    <p:spTree>
+      <p:nvGrpSpPr>
+        <p:cNvPr id="1" name=""/>
+        <p:cNvGrpSpPr/>
+        <p:nvPr/>
+      </p:nvGrpSpPr>
+      <p:grpSpPr>
+        <a:xfrm>
+          <a:off x="0" y="0"/>
+          <a:ext cx="0" cy="0"/>
+          <a:chOff x="0" y="0"/>
+          <a:chExt cx="0" cy="0"/>
+        </a:xfrm>
+      </p:grpSpPr>
+      <p:sp>
+        <p:nvSpPr>
+          <p:cNvPr id="2" name="Slide Image Placeholder 1"/>
+          <p:cNvSpPr>
+            <a:spLocks noGrp="1"/>
+          </p:cNvSpPr>
+          <p:nvPr>
+            <p:ph type="sldImg" idx="2"/>
+          </p:nvPr>
+        </p:nvSpPr>
+        <p:spPr/>
+      </p:sp>
+      <p:sp>
+        <p:nvSpPr>
+          <p:cNvPr id="3" name="Notes Placeholder 2"/>
+          <p:cNvSpPr>
+            <a:spLocks noGrp="1"/>
+          </p:cNvSpPr>
+          <p:nvPr>
+            <p:ph type="body" idx="3" sz="quarter"/>
+          </p:nvPr>
+        </p:nvSpPr>
+        <p:spPr/>
+        <p:txBody>
+          <a:bodyPr/>
+          <a:lstStyle/>
+          <a:p>
+            <a:r>
+              <a:t>A real request has three things: specific (he can picture it); a by-when (it lands in time); room for a yes or a no (a request, not a demand). Nagging is repeating a vague thing; a real request is clean.</a:t>
+            </a:r>
+          </a:p>
+        </p:txBody>
+      </p:sp>
+      <p:sp>
+        <p:nvSpPr>
+          <p:cNvPr id="4" name="Slide Number Placeholder 3"/>
+          <p:cNvSpPr>
+            <a:spLocks noGrp="1"/>
+          </p:cNvSpPr>
+          <p:nvPr>
+            <p:ph type="sldNum" idx="5" sz="quarter"/>
+          </p:nvPr>
+        </p:nvSpPr>
+        <p:spPr/>
+      </p:sp>
+    </p:spTree>
+  </p:cSld>
+  <p:clrMapOvr>
+    <a:masterClrMapping/>
+  </p:clrMapOvr>
+</p:notes>
+</file>
+
+<file path=ppt/notesSlides/notesSlide7.xml><?xml version="1.0" encoding="utf-8"?>
+<p:notes xmlns:a="http://schemas.openxmlformats.org/drawingml/2006/main" xmlns:p="http://schemas.openxmlformats.org/presentationml/2006/main" xmlns:r="http://schemas.openxmlformats.org/officeDocument/2006/relationships">
+  <p:cSld>
+    <p:spTree>
+      <p:nvGrpSpPr>
+        <p:cNvPr id="1" name=""/>
+        <p:cNvGrpSpPr/>
+        <p:nvPr/>
+      </p:nvGrpSpPr>
+      <p:grpSpPr>
+        <a:xfrm>
+          <a:off x="0" y="0"/>
+          <a:ext cx="0" cy="0"/>
+          <a:chOff x="0" y="0"/>
+          <a:chExt cx="0" cy="0"/>
+        </a:xfrm>
+      </p:grpSpPr>
+      <p:sp>
+        <p:nvSpPr>
+          <p:cNvPr id="2" name="Slide Image Placeholder 1"/>
+          <p:cNvSpPr>
+            <a:spLocks noGrp="1"/>
+          </p:cNvSpPr>
+          <p:nvPr>
+            <p:ph type="sldImg" idx="2"/>
+          </p:nvPr>
+        </p:nvSpPr>
+        <p:spPr/>
+      </p:sp>
+      <p:sp>
+        <p:nvSpPr>
+          <p:cNvPr id="3" name="Notes Placeholder 2"/>
+          <p:cNvSpPr>
+            <a:spLocks noGrp="1"/>
+          </p:cNvSpPr>
+          <p:nvPr>
+            <p:ph type="body" idx="3" sz="quarter"/>
+          </p:nvPr>
+        </p:nvSpPr>
+        <p:spPr/>
+        <p:txBody>
+          <a:bodyPr/>
+          <a:lstStyle/>
+          <a:p>
+            <a:r>
+              <a:t>Broadcast. In pairs: share it the messy way first; then say it in one clean sentence, 'I want... by...'; partner reflects back the clear request. Swap. Main-room: what did it feel like to say the clean version?</a:t>
+            </a:r>
+          </a:p>
+        </p:txBody>
+      </p:sp>
+      <p:sp>
+        <p:nvSpPr>
+          <p:cNvPr id="4" name="Slide Number Placeholder 3"/>
+          <p:cNvSpPr>
+            <a:spLocks noGrp="1"/>
+          </p:cNvSpPr>
+          <p:nvPr>
+            <p:ph type="sldNum" idx="5" sz="quarter"/>
+          </p:nvPr>
+        </p:nvSpPr>
+        <p:spPr/>
+      </p:sp>
+    </p:spTree>
+  </p:cSld>
+  <p:clrMapOvr>
+    <a:masterClrMapping/>
+  </p:clrMapOvr>
+</p:notes>
+</file>
+
+<file path=ppt/notesSlides/notesSlide8.xml><?xml version="1.0" encoding="utf-8"?>
+<p:notes xmlns:a="http://schemas.openxmlformats.org/drawingml/2006/main" xmlns:p="http://schemas.openxmlformats.org/presentationml/2006/main" xmlns:r="http://schemas.openxmlformats.org/officeDocument/2006/relationships">
+  <p:cSld>
+    <p:spTree>
+      <p:nvGrpSpPr>
+        <p:cNvPr id="1" name=""/>
+        <p:cNvGrpSpPr/>
+        <p:nvPr/>
+      </p:nvGrpSpPr>
+      <p:grpSpPr>
+        <a:xfrm>
+          <a:off x="0" y="0"/>
+          <a:ext cx="0" cy="0"/>
+          <a:chOff x="0" y="0"/>
+          <a:chExt cx="0" cy="0"/>
+        </a:xfrm>
+      </p:grpSpPr>
+      <p:sp>
+        <p:nvSpPr>
+          <p:cNvPr id="2" name="Slide Image Placeholder 1"/>
+          <p:cNvSpPr>
+            <a:spLocks noGrp="1"/>
+          </p:cNvSpPr>
+          <p:nvPr>
+            <p:ph type="sldImg" idx="2"/>
+          </p:nvPr>
+        </p:nvSpPr>
+        <p:spPr/>
+      </p:sp>
+      <p:sp>
+        <p:nvSpPr>
+          <p:cNvPr id="3" name="Notes Placeholder 2"/>
+          <p:cNvSpPr>
+            <a:spLocks noGrp="1"/>
+          </p:cNvSpPr>
+          <p:nvPr>
+            <p:ph type="body" idx="3" sz="quarter"/>
+          </p:nvPr>
+        </p:nvSpPr>
+        <p:spPr/>
+        <p:txBody>
+          <a:bodyPr/>
+          <a:lstStyle/>
+          <a:p>
+            <a:r>
+              <a:t>Armstrong's four steps: 1) describe exactly what you want; 2) say what it would give you; 3) say what's in it for him; 4) ask 'what do you need from me to give me that?' That last line turns a request into a team.</a:t>
+            </a:r>
+          </a:p>
+        </p:txBody>
+      </p:sp>
+      <p:sp>
+        <p:nvSpPr>
+          <p:cNvPr id="4" name="Slide Number Placeholder 3"/>
+          <p:cNvSpPr>
+            <a:spLocks noGrp="1"/>
+          </p:cNvSpPr>
+          <p:nvPr>
+            <p:ph type="sldNum" idx="5" sz="quarter"/>
+          </p:nvPr>
+        </p:nvSpPr>
+        <p:spPr/>
+      </p:sp>
+    </p:spTree>
+  </p:cSld>
+  <p:clrMapOvr>
+    <a:masterClrMapping/>
+  </p:clrMapOvr>
+</p:notes>
+</file>
+
+<file path=ppt/notesSlides/notesSlide9.xml><?xml version="1.0" encoding="utf-8"?>
+<p:notes xmlns:a="http://schemas.openxmlformats.org/drawingml/2006/main" xmlns:p="http://schemas.openxmlformats.org/presentationml/2006/main" xmlns:r="http://schemas.openxmlformats.org/officeDocument/2006/relationships">
+  <p:cSld>
+    <p:spTree>
+      <p:nvGrpSpPr>
+        <p:cNvPr id="1" name=""/>
+        <p:cNvGrpSpPr/>
+        <p:nvPr/>
+      </p:nvGrpSpPr>
+      <p:grpSpPr>
+        <a:xfrm>
+          <a:off x="0" y="0"/>
+          <a:ext cx="0" cy="0"/>
+          <a:chOff x="0" y="0"/>
+          <a:chExt cx="0" cy="0"/>
+        </a:xfrm>
+      </p:grpSpPr>
+      <p:sp>
+        <p:nvSpPr>
+          <p:cNvPr id="2" name="Slide Image Placeholder 1"/>
+          <p:cNvSpPr>
+            <a:spLocks noGrp="1"/>
+          </p:cNvSpPr>
+          <p:nvPr>
+            <p:ph type="sldImg" idx="2"/>
+          </p:nvPr>
+        </p:nvSpPr>
+        <p:spPr/>
+      </p:sp>
+      <p:sp>
+        <p:nvSpPr>
+          <p:cNvPr id="3" name="Notes Placeholder 2"/>
+          <p:cNvSpPr>
+            <a:spLocks noGrp="1"/>
+          </p:cNvSpPr>
+          <p:nvPr>
+            <p:ph type="body" idx="3" sz="quarter"/>
+          </p:nvPr>
+        </p:nvSpPr>
+        <p:spPr/>
+        <p:txBody>
+          <a:bodyPr/>
+          <a:lstStyle/>
+          <a:p>
+            <a:r>
+              <a:t>Frustration is the gap between an expectation you never spoke and the influence you didn't use. An unspoken expectation is a resentment in waiting; a spoken request is an act of intimacy.</a:t>
+            </a:r>
+          </a:p>
+        </p:txBody>
+      </p:sp>
+      <p:sp>
+        <p:nvSpPr>
+          <p:cNvPr id="4" name="Slide Number Placeholder 3"/>
+          <p:cNvSpPr>
+            <a:spLocks noGrp="1"/>
+          </p:cNvSpPr>
+          <p:nvPr>
+            <p:ph type="sldNum" idx="5" sz="quarter"/>
+          </p:nvPr>
+        </p:nvSpPr>
+        <p:spPr/>
+      </p:sp>
+    </p:spTree>
+  </p:cSld>
+  <p:clrMapOvr>
+    <a:masterClrMapping/>
+  </p:clrMapOvr>
+</p:notes>
 </file>
 
 <file path=ppt/slideLayouts/slideLayout1.xml><?xml version="1.0" encoding="utf-8"?>
@@ -6963,4 +8503,324 @@
   </a:objectDefaults>
   <a:extraClrSchemeLst/>
 </a:theme>
+</file>
+
+<file path=ppt/theme/theme2.xml><?xml version="1.0" encoding="utf-8"?>
+<a:theme xmlns:a="http://schemas.openxmlformats.org/drawingml/2006/main" name="Office Theme">
+  <a:themeElements>
+    <a:clrScheme name="Office">
+      <a:dk1>
+        <a:sysClr val="windowText" lastClr="000000"/>
+      </a:dk1>
+      <a:lt1>
+        <a:sysClr val="window" lastClr="FFFFFF"/>
+      </a:lt1>
+      <a:dk2>
+        <a:srgbClr val="1F497D"/>
+      </a:dk2>
+      <a:lt2>
+        <a:srgbClr val="EEECE1"/>
+      </a:lt2>
+      <a:accent1>
+        <a:srgbClr val="4F81BD"/>
+      </a:accent1>
+      <a:accent2>
+        <a:srgbClr val="C0504D"/>
+      </a:accent2>
+      <a:accent3>
+        <a:srgbClr val="9BBB59"/>
+      </a:accent3>
+      <a:accent4>
+        <a:srgbClr val="8064A2"/>
+      </a:accent4>
+      <a:accent5>
+        <a:srgbClr val="4BACC6"/>
+      </a:accent5>
+      <a:accent6>
+        <a:srgbClr val="F79646"/>
+      </a:accent6>
+      <a:hlink>
+        <a:srgbClr val="0000FF"/>
+      </a:hlink>
+      <a:folHlink>
+        <a:srgbClr val="800080"/>
+      </a:folHlink>
+    </a:clrScheme>
+    <a:fontScheme name="Office">
+      <a:majorFont>
+        <a:latin typeface="Calibri"/>
+        <a:ea typeface=""/>
+        <a:cs typeface=""/>
+        <a:font script="Jpan" typeface="ＭＳ Ｐゴシック"/>
+        <a:font script="Hang" typeface="맑은 고딕"/>
+        <a:font script="Hans" typeface="宋体"/>
+        <a:font script="Hant" typeface="新細明體"/>
+        <a:font script="Arab" typeface="Times New Roman"/>
+        <a:font script="Hebr" typeface="Times New Roman"/>
+        <a:font script="Thai" typeface="Angsana New"/>
+        <a:font script="Ethi" typeface="Nyala"/>
+        <a:font script="Beng" typeface="Vrinda"/>
+        <a:font script="Gujr" typeface="Shruti"/>
+        <a:font script="Khmr" typeface="MoolBoran"/>
+        <a:font script="Knda" typeface="Tunga"/>
+        <a:font script="Guru" typeface="Raavi"/>
+        <a:font script="Cans" typeface="Euphemia"/>
+        <a:font script="Cher" typeface="Plantagenet Cherokee"/>
+        <a:font script="Yiii" typeface="Microsoft Yi Baiti"/>
+        <a:font script="Tibt" typeface="Microsoft Himalaya"/>
+        <a:font script="Thaa" typeface="MV Boli"/>
+        <a:font script="Deva" typeface="Mangal"/>
+        <a:font script="Telu" typeface="Gautami"/>
+        <a:font script="Taml" typeface="Latha"/>
+        <a:font script="Syrc" typeface="Estrangelo Edessa"/>
+        <a:font script="Orya" typeface="Kalinga"/>
+        <a:font script="Mlym" typeface="Kartika"/>
+        <a:font script="Laoo" typeface="DokChampa"/>
+        <a:font script="Sinh" typeface="Iskoola Pota"/>
+        <a:font script="Mong" typeface="Mongolian Baiti"/>
+        <a:font script="Viet" typeface="Times New Roman"/>
+        <a:font script="Uigh" typeface="Microsoft Uighur"/>
+        <a:font script="Geor" typeface="Sylfaen"/>
+      </a:majorFont>
+      <a:minorFont>
+        <a:latin typeface="Calibri"/>
+        <a:ea typeface=""/>
+        <a:cs typeface=""/>
+        <a:font script="Jpan" typeface="ＭＳ Ｐゴシック"/>
+        <a:font script="Hang" typeface="맑은 고딕"/>
+        <a:font script="Hans" typeface="宋体"/>
+        <a:font script="Hant" typeface="新細明體"/>
+        <a:font script="Arab" typeface="Arial"/>
+        <a:font script="Hebr" typeface="Arial"/>
+        <a:font script="Thai" typeface="Cordia New"/>
+        <a:font script="Ethi" typeface="Nyala"/>
+        <a:font script="Beng" typeface="Vrinda"/>
+        <a:font script="Gujr" typeface="Shruti"/>
+        <a:font script="Khmr" typeface="DaunPenh"/>
+        <a:font script="Knda" typeface="Tunga"/>
+        <a:font script="Guru" typeface="Raavi"/>
+        <a:font script="Cans" typeface="Euphemia"/>
+        <a:font script="Cher" typeface="Plantagenet Cherokee"/>
+        <a:font script="Yiii" typeface="Microsoft Yi Baiti"/>
+        <a:font script="Tibt" typeface="Microsoft Himalaya"/>
+        <a:font script="Thaa" typeface="MV Boli"/>
+        <a:font script="Deva" typeface="Mangal"/>
+        <a:font script="Telu" typeface="Gautami"/>
+        <a:font script="Taml" typeface="Latha"/>
+        <a:font script="Syrc" typeface="Estrangelo Edessa"/>
+        <a:font script="Orya" typeface="Kalinga"/>
+        <a:font script="Mlym" typeface="Kartika"/>
+        <a:font script="Laoo" typeface="DokChampa"/>
+        <a:font script="Sinh" typeface="Iskoola Pota"/>
+        <a:font script="Mong" typeface="Mongolian Baiti"/>
+        <a:font script="Viet" typeface="Arial"/>
+        <a:font script="Uigh" typeface="Microsoft Uighur"/>
+        <a:font script="Geor" typeface="Sylfaen"/>
+      </a:minorFont>
+    </a:fontScheme>
+    <a:fmtScheme name="Office">
+      <a:fillStyleLst>
+        <a:solidFill>
+          <a:schemeClr val="phClr"/>
+        </a:solidFill>
+        <a:gradFill rotWithShape="1">
+          <a:gsLst>
+            <a:gs pos="0">
+              <a:schemeClr val="phClr">
+                <a:tint val="50000"/>
+                <a:satMod val="300000"/>
+              </a:schemeClr>
+            </a:gs>
+            <a:gs pos="35000">
+              <a:schemeClr val="phClr">
+                <a:tint val="37000"/>
+                <a:satMod val="300000"/>
+              </a:schemeClr>
+            </a:gs>
+            <a:gs pos="100000">
+              <a:schemeClr val="phClr">
+                <a:tint val="15000"/>
+                <a:satMod val="350000"/>
+              </a:schemeClr>
+            </a:gs>
+          </a:gsLst>
+          <a:lin ang="16200000" scaled="1"/>
+        </a:gradFill>
+        <a:gradFill rotWithShape="1">
+          <a:gsLst>
+            <a:gs pos="0">
+              <a:schemeClr val="phClr">
+                <a:tint val="100000"/>
+                <a:shade val="100000"/>
+                <a:satMod val="130000"/>
+              </a:schemeClr>
+            </a:gs>
+            <a:gs pos="100000">
+              <a:schemeClr val="phClr">
+                <a:tint val="50000"/>
+                <a:shade val="100000"/>
+                <a:satMod val="350000"/>
+              </a:schemeClr>
+            </a:gs>
+          </a:gsLst>
+          <a:lin ang="16200000" scaled="0"/>
+        </a:gradFill>
+      </a:fillStyleLst>
+      <a:lnStyleLst>
+        <a:ln w="9525" cap="flat" cmpd="sng" algn="ctr">
+          <a:solidFill>
+            <a:schemeClr val="phClr">
+              <a:shade val="95000"/>
+              <a:satMod val="105000"/>
+            </a:schemeClr>
+          </a:solidFill>
+          <a:prstDash val="solid"/>
+        </a:ln>
+        <a:ln w="25400" cap="flat" cmpd="sng" algn="ctr">
+          <a:solidFill>
+            <a:schemeClr val="phClr"/>
+          </a:solidFill>
+          <a:prstDash val="solid"/>
+        </a:ln>
+        <a:ln w="38100" cap="flat" cmpd="sng" algn="ctr">
+          <a:solidFill>
+            <a:schemeClr val="phClr"/>
+          </a:solidFill>
+          <a:prstDash val="solid"/>
+        </a:ln>
+      </a:lnStyleLst>
+      <a:effectStyleLst>
+        <a:effectStyle>
+          <a:effectLst>
+            <a:outerShdw blurRad="40000" dist="20000" dir="5400000" rotWithShape="0">
+              <a:srgbClr val="000000">
+                <a:alpha val="38000"/>
+              </a:srgbClr>
+            </a:outerShdw>
+          </a:effectLst>
+        </a:effectStyle>
+        <a:effectStyle>
+          <a:effectLst>
+            <a:outerShdw blurRad="40000" dist="23000" dir="5400000" rotWithShape="0">
+              <a:srgbClr val="000000">
+                <a:alpha val="35000"/>
+              </a:srgbClr>
+            </a:outerShdw>
+          </a:effectLst>
+        </a:effectStyle>
+        <a:effectStyle>
+          <a:effectLst>
+            <a:outerShdw blurRad="40000" dist="23000" dir="5400000" rotWithShape="0">
+              <a:srgbClr val="000000">
+                <a:alpha val="35000"/>
+              </a:srgbClr>
+            </a:outerShdw>
+          </a:effectLst>
+          <a:scene3d>
+            <a:camera prst="orthographicFront">
+              <a:rot lat="0" lon="0" rev="0"/>
+            </a:camera>
+            <a:lightRig rig="threePt" dir="t">
+              <a:rot lat="0" lon="0" rev="1200000"/>
+            </a:lightRig>
+          </a:scene3d>
+          <a:sp3d>
+            <a:bevelT w="63500" h="25400"/>
+          </a:sp3d>
+        </a:effectStyle>
+      </a:effectStyleLst>
+      <a:bgFillStyleLst>
+        <a:solidFill>
+          <a:schemeClr val="phClr"/>
+        </a:solidFill>
+        <a:gradFill rotWithShape="1">
+          <a:gsLst>
+            <a:gs pos="0">
+              <a:schemeClr val="phClr">
+                <a:tint val="40000"/>
+                <a:satMod val="350000"/>
+              </a:schemeClr>
+            </a:gs>
+            <a:gs pos="40000">
+              <a:schemeClr val="phClr">
+                <a:tint val="45000"/>
+                <a:shade val="99000"/>
+                <a:satMod val="350000"/>
+              </a:schemeClr>
+            </a:gs>
+            <a:gs pos="100000">
+              <a:schemeClr val="phClr">
+                <a:shade val="20000"/>
+                <a:satMod val="255000"/>
+              </a:schemeClr>
+            </a:gs>
+          </a:gsLst>
+          <a:path path="circle">
+            <a:fillToRect l="50000" t="-80000" r="50000" b="180000"/>
+          </a:path>
+        </a:gradFill>
+        <a:gradFill rotWithShape="1">
+          <a:gsLst>
+            <a:gs pos="0">
+              <a:schemeClr val="phClr">
+                <a:tint val="80000"/>
+                <a:satMod val="300000"/>
+              </a:schemeClr>
+            </a:gs>
+            <a:gs pos="100000">
+              <a:schemeClr val="phClr">
+                <a:shade val="30000"/>
+                <a:satMod val="200000"/>
+              </a:schemeClr>
+            </a:gs>
+          </a:gsLst>
+          <a:path path="circle">
+            <a:fillToRect l="50000" t="50000" r="50000" b="50000"/>
+          </a:path>
+        </a:gradFill>
+      </a:bgFillStyleLst>
+    </a:fmtScheme>
+  </a:themeElements>
+  <a:objectDefaults>
+    <a:spDef>
+      <a:spPr/>
+      <a:bodyPr/>
+      <a:lstStyle/>
+      <a:style>
+        <a:lnRef idx="1">
+          <a:schemeClr val="accent1"/>
+        </a:lnRef>
+        <a:fillRef idx="3">
+          <a:schemeClr val="accent1"/>
+        </a:fillRef>
+        <a:effectRef idx="2">
+          <a:schemeClr val="accent1"/>
+        </a:effectRef>
+        <a:fontRef idx="minor">
+          <a:schemeClr val="lt1"/>
+        </a:fontRef>
+      </a:style>
+    </a:spDef>
+    <a:lnDef>
+      <a:spPr/>
+      <a:bodyPr/>
+      <a:lstStyle/>
+      <a:style>
+        <a:lnRef idx="2">
+          <a:schemeClr val="accent1"/>
+        </a:lnRef>
+        <a:fillRef idx="0">
+          <a:schemeClr val="accent1"/>
+        </a:fillRef>
+        <a:effectRef idx="1">
+          <a:schemeClr val="accent1"/>
+        </a:effectRef>
+        <a:fontRef idx="minor">
+          <a:schemeClr val="tx1"/>
+        </a:fontRef>
+      </a:style>
+    </a:lnDef>
+  </a:objectDefaults>
+  <a:extraClrSchemeLst/>
+</a:theme>
 </file>